--- a/slides/direct_2023_mopinn.pptx
+++ b/slides/direct_2023_mopinn.pptx
@@ -3899,8 +3899,8 @@
                             <m:d>
                               <m:dPr>
                                 <m:begChr m:val="("/>
+                                <m:sepChr m:val=""/>
                                 <m:endChr m:val=")"/>
-                                <m:sepChr m:val=""/>
                                 <m:grow/>
                               </m:dPr>
                               <m:e>
@@ -3939,8 +3939,8 @@
                             <m:d>
                               <m:dPr>
                                 <m:begChr m:val="["/>
+                                <m:sepChr m:val=""/>
                                 <m:endChr m:val="]"/>
-                                <m:sepChr m:val=""/>
                                 <m:grow/>
                               </m:dPr>
                               <m:e>
@@ -4046,8 +4046,8 @@
                     <m:d>
                       <m:dPr>
                         <m:begChr m:val="("/>
+                        <m:sepChr m:val=""/>
                         <m:endChr m:val=")"/>
-                        <m:sepChr m:val=""/>
                         <m:grow/>
                       </m:dPr>
                       <m:e>
@@ -4302,8 +4302,8 @@
                             <m:d>
                               <m:dPr>
                                 <m:begChr m:val="("/>
+                                <m:sepChr m:val=""/>
                                 <m:endChr m:val=")"/>
-                                <m:sepChr m:val=""/>
                                 <m:grow/>
                               </m:dPr>
                               <m:e>
@@ -4417,8 +4417,8 @@
                             <m:d>
                               <m:dPr>
                                 <m:begChr m:val="("/>
+                                <m:sepChr m:val=""/>
                                 <m:endChr m:val=")"/>
-                                <m:sepChr m:val=""/>
                                 <m:grow/>
                               </m:dPr>
                               <m:e>
@@ -4484,8 +4484,8 @@
                             <m:d>
                               <m:dPr>
                                 <m:begChr m:val="["/>
+                                <m:sepChr m:val=""/>
                                 <m:endChr m:val="]"/>
-                                <m:sepChr m:val=""/>
                                 <m:grow/>
                               </m:dPr>
                               <m:e>
@@ -4564,8 +4564,8 @@
                     <m:d>
                       <m:dPr>
                         <m:begChr m:val="("/>
+                        <m:sepChr m:val=""/>
                         <m:endChr m:val=")"/>
-                        <m:sepChr m:val=""/>
                         <m:grow/>
                       </m:dPr>
                       <m:e>
@@ -4586,8 +4586,8 @@
                     <m:d>
                       <m:dPr>
                         <m:begChr m:val="("/>
+                        <m:sepChr m:val=""/>
                         <m:endChr m:val=")"/>
-                        <m:sepChr m:val=""/>
                         <m:grow/>
                       </m:dPr>
                       <m:e>
@@ -5244,8 +5244,8 @@
                             <m:d>
                               <m:dPr>
                                 <m:begChr m:val="("/>
+                                <m:sepChr m:val=""/>
                                 <m:endChr m:val=")"/>
-                                <m:sepChr m:val=""/>
                                 <m:grow/>
                               </m:dPr>
                               <m:e>
@@ -5284,8 +5284,8 @@
                             <m:d>
                               <m:dPr>
                                 <m:begChr m:val="["/>
+                                <m:sepChr m:val=""/>
                                 <m:endChr m:val="]"/>
-                                <m:sepChr m:val=""/>
                                 <m:grow/>
                               </m:dPr>
                               <m:e>
@@ -5363,8 +5363,8 @@
                     <m:d>
                       <m:dPr>
                         <m:begChr m:val="["/>
+                        <m:sepChr m:val=""/>
                         <m:endChr m:val="]"/>
-                        <m:sepChr m:val=""/>
                         <m:grow/>
                       </m:dPr>
                       <m:e>
@@ -5929,8 +5929,8 @@
                             <m:d>
                               <m:dPr>
                                 <m:begChr m:val="("/>
+                                <m:sepChr m:val=""/>
                                 <m:endChr m:val=")"/>
-                                <m:sepChr m:val=""/>
                                 <m:grow/>
                               </m:dPr>
                               <m:e>
@@ -6044,8 +6044,8 @@
                             <m:d>
                               <m:dPr>
                                 <m:begChr m:val="("/>
+                                <m:sepChr m:val=""/>
                                 <m:endChr m:val=")"/>
-                                <m:sepChr m:val=""/>
                                 <m:grow/>
                               </m:dPr>
                               <m:e>
@@ -6111,8 +6111,8 @@
                             <m:d>
                               <m:dPr>
                                 <m:begChr m:val="["/>
+                                <m:sepChr m:val=""/>
                                 <m:endChr m:val="]"/>
-                                <m:sepChr m:val=""/>
                                 <m:grow/>
                               </m:dPr>
                               <m:e>
@@ -6191,8 +6191,8 @@
                     <m:d>
                       <m:dPr>
                         <m:begChr m:val="("/>
+                        <m:sepChr m:val=""/>
                         <m:endChr m:val=")"/>
-                        <m:sepChr m:val=""/>
                         <m:grow/>
                       </m:dPr>
                       <m:e>
@@ -6213,8 +6213,8 @@
                     <m:d>
                       <m:dPr>
                         <m:begChr m:val="("/>
+                        <m:sepChr m:val=""/>
                         <m:endChr m:val=")"/>
-                        <m:sepChr m:val=""/>
                         <m:grow/>
                       </m:dPr>
                       <m:e>
@@ -6247,8 +6247,8 @@
                     <m:d>
                       <m:dPr>
                         <m:begChr m:val="["/>
+                        <m:sepChr m:val=""/>
                         <m:endChr m:val="]"/>
-                        <m:sepChr m:val=""/>
                         <m:grow/>
                       </m:dPr>
                       <m:e>
@@ -7373,8 +7373,8 @@
                             <m:d>
                               <m:dPr>
                                 <m:begChr m:val="("/>
+                                <m:sepChr m:val=""/>
                                 <m:endChr m:val=")"/>
-                                <m:sepChr m:val=""/>
                                 <m:grow/>
                               </m:dPr>
                               <m:e>
@@ -7507,8 +7507,8 @@
                             <m:d>
                               <m:dPr>
                                 <m:begChr m:val="("/>
+                                <m:sepChr m:val=""/>
                                 <m:endChr m:val=")"/>
-                                <m:sepChr m:val=""/>
                                 <m:grow/>
                               </m:dPr>
                               <m:e>
@@ -7616,8 +7616,8 @@
                             <m:d>
                               <m:dPr>
                                 <m:begChr m:val="("/>
+                                <m:sepChr m:val=""/>
                                 <m:endChr m:val=")"/>
-                                <m:sepChr m:val=""/>
                                 <m:grow/>
                               </m:dPr>
                               <m:e>
@@ -7749,8 +7749,8 @@
                             <m:d>
                               <m:dPr>
                                 <m:begChr m:val="("/>
+                                <m:sepChr m:val=""/>
                                 <m:endChr m:val=")"/>
-                                <m:sepChr m:val=""/>
                                 <m:grow/>
                               </m:dPr>
                               <m:e>
@@ -7797,8 +7797,8 @@
                             <m:d>
                               <m:dPr>
                                 <m:begChr m:val="("/>
+                                <m:sepChr m:val=""/>
                                 <m:endChr m:val=")"/>
-                                <m:sepChr m:val=""/>
                                 <m:grow/>
                               </m:dPr>
                               <m:e>
@@ -7842,8 +7842,8 @@
                             <m:d>
                               <m:dPr>
                                 <m:begChr m:val="("/>
+                                <m:sepChr m:val=""/>
                                 <m:endChr m:val=")"/>
-                                <m:sepChr m:val=""/>
                                 <m:grow/>
                               </m:dPr>
                               <m:e>
@@ -7948,8 +7948,8 @@
                             <m:d>
                               <m:dPr>
                                 <m:begChr m:val="("/>
+                                <m:sepChr m:val=""/>
                                 <m:endChr m:val=")"/>
-                                <m:sepChr m:val=""/>
                                 <m:grow/>
                               </m:dPr>
                               <m:e>
@@ -7996,8 +7996,8 @@
                             <m:d>
                               <m:dPr>
                                 <m:begChr m:val="("/>
+                                <m:sepChr m:val=""/>
                                 <m:endChr m:val=")"/>
-                                <m:sepChr m:val=""/>
                                 <m:grow/>
                               </m:dPr>
                               <m:e>
@@ -8041,8 +8041,8 @@
                             <m:d>
                               <m:dPr>
                                 <m:begChr m:val="("/>
+                                <m:sepChr m:val=""/>
                                 <m:endChr m:val=")"/>
-                                <m:sepChr m:val=""/>
                                 <m:grow/>
                               </m:dPr>
                               <m:e>
@@ -8847,8 +8847,8 @@
                             <m:d>
                               <m:dPr>
                                 <m:begChr m:val="("/>
+                                <m:sepChr m:val=""/>
                                 <m:endChr m:val=")"/>
-                                <m:sepChr m:val=""/>
                                 <m:grow/>
                               </m:dPr>
                               <m:e>
@@ -9001,8 +9001,8 @@
                             <m:d>
                               <m:dPr>
                                 <m:begChr m:val="("/>
+                                <m:sepChr m:val=""/>
                                 <m:endChr m:val=")"/>
-                                <m:sepChr m:val=""/>
                                 <m:grow/>
                               </m:dPr>
                               <m:e>
@@ -9120,8 +9120,8 @@
                             <m:d>
                               <m:dPr>
                                 <m:begChr m:val="("/>
+                                <m:sepChr m:val=""/>
                                 <m:endChr m:val=")"/>
-                                <m:sepChr m:val=""/>
                                 <m:grow/>
                               </m:dPr>
                               <m:e>
@@ -9266,8 +9266,8 @@
                             <m:d>
                               <m:dPr>
                                 <m:begChr m:val="("/>
+                                <m:sepChr m:val=""/>
                                 <m:endChr m:val=")"/>
-                                <m:sepChr m:val=""/>
                                 <m:grow/>
                               </m:dPr>
                               <m:e>
@@ -9324,8 +9324,8 @@
                             <m:d>
                               <m:dPr>
                                 <m:begChr m:val="("/>
+                                <m:sepChr m:val=""/>
                                 <m:endChr m:val=")"/>
-                                <m:sepChr m:val=""/>
                                 <m:grow/>
                               </m:dPr>
                               <m:e>
@@ -9357,8 +9357,8 @@
                             <m:d>
                               <m:dPr>
                                 <m:begChr m:val="("/>
+                                <m:sepChr m:val=""/>
                                 <m:endChr m:val=")"/>
-                                <m:sepChr m:val=""/>
                                 <m:grow/>
                               </m:dPr>
                               <m:e>
@@ -9377,8 +9377,8 @@
                                 <m:d>
                                   <m:dPr>
                                     <m:begChr m:val="("/>
+                                    <m:sepChr m:val=""/>
                                     <m:endChr m:val=")"/>
-                                    <m:sepChr m:val=""/>
                                     <m:grow/>
                                   </m:dPr>
                                   <m:e>
@@ -9511,8 +9511,8 @@
                             <m:d>
                               <m:dPr>
                                 <m:begChr m:val="("/>
+                                <m:sepChr m:val=""/>
                                 <m:endChr m:val=")"/>
-                                <m:sepChr m:val=""/>
                                 <m:grow/>
                               </m:dPr>
                               <m:e>
@@ -9569,8 +9569,8 @@
                             <m:d>
                               <m:dPr>
                                 <m:begChr m:val="("/>
+                                <m:sepChr m:val=""/>
                                 <m:endChr m:val=")"/>
-                                <m:sepChr m:val=""/>
                                 <m:grow/>
                               </m:dPr>
                               <m:e>
@@ -9602,8 +9602,8 @@
                             <m:d>
                               <m:dPr>
                                 <m:begChr m:val="("/>
+                                <m:sepChr m:val=""/>
                                 <m:endChr m:val=")"/>
-                                <m:sepChr m:val=""/>
                                 <m:grow/>
                               </m:dPr>
                               <m:e>
@@ -9622,8 +9622,8 @@
                                 <m:d>
                                   <m:dPr>
                                     <m:begChr m:val="("/>
+                                    <m:sepChr m:val=""/>
                                     <m:endChr m:val=")"/>
-                                    <m:sepChr m:val=""/>
                                     <m:grow/>
                                   </m:dPr>
                                   <m:e>
@@ -9838,8 +9838,8 @@
                                 <m:d>
                                   <m:dPr>
                                     <m:begChr m:val="("/>
+                                    <m:sepChr m:val=""/>
                                     <m:endChr m:val=")"/>
-                                    <m:sepChr m:val=""/>
                                     <m:grow/>
                                   </m:dPr>
                                   <m:e>
@@ -10438,8 +10438,8 @@
                             <m:d>
                               <m:dPr>
                                 <m:begChr m:val="["/>
+                                <m:sepChr m:val=""/>
                                 <m:endChr m:val="]"/>
-                                <m:sepChr m:val=""/>
                                 <m:grow/>
                               </m:dPr>
                               <m:e>
@@ -10527,8 +10527,8 @@
                     <m:d>
                       <m:dPr>
                         <m:begChr m:val="("/>
+                        <m:sepChr m:val=""/>
                         <m:endChr m:val=")"/>
-                        <m:sepChr m:val=""/>
                         <m:grow/>
                       </m:dPr>
                       <m:e>
